--- a/jumpstart-kits/js1-stackup-components/part3-versal-fpga/JS1_Part3_Versal-FPGA_Presentation.pptx
+++ b/jumpstart-kits/js1-stackup-components/part3-versal-fpga/JS1_Part3_Versal-FPGA_Presentation.pptx
@@ -4318,7 +4318,7 @@
                 </a:solidFill>
                 <a:latin typeface="Arial"/>
               </a:rPr>
-              <a:t>17 tests + 74 subtests on public jitx 4.2.2 — hand-read ball spot-checks across grid corners and every bank type, symbol coverage, mapping bijectivity, circuit rail roster.</a:t>
+              <a:t>17 tests + 74 subtests on jitx 4.4 — hand-read ball spot-checks across grid corners and every bank type, symbol coverage, mapping bijectivity, circuit rail roster.</a:t>
             </a:r>
           </a:p>
           <a:p>
